--- a/make_presentation/templates/templates/premium/no_logo_14.pptx
+++ b/make_presentation/templates/templates/premium/no_logo_14.pptx
@@ -308,7 +308,7 @@
             <a:pPr algn="r">
               <a:buNone/>
             </a:pPr>
-            <a:fld id="{E98B468C-8E2F-45C5-9361-2C609C657CED}" type="slidenum">
+            <a:fld id="{D05A4A8F-FE51-4C43-846A-138AD2A9955B}" type="slidenum">
               <a:rPr b="0" lang="en-US" sz="1400" spc="-1" strike="noStrike">
                 <a:latin typeface="Times New Roman"/>
               </a:rPr>
@@ -345,7 +345,7 @@
       </p:grpSpPr>
       <p:sp>
         <p:nvSpPr>
-          <p:cNvPr id="210" name="PlaceHolder 1"/>
+          <p:cNvPr id="208" name="PlaceHolder 1"/>
           <p:cNvSpPr>
             <a:spLocks noGrp="1"/>
           </p:cNvSpPr>
@@ -368,7 +368,7 @@
       </p:sp>
       <p:sp>
         <p:nvSpPr>
-          <p:cNvPr id="211" name="PlaceHolder 2"/>
+          <p:cNvPr id="209" name="PlaceHolder 2"/>
           <p:cNvSpPr>
             <a:spLocks noGrp="1"/>
           </p:cNvSpPr>
@@ -402,7 +402,7 @@
       </p:sp>
       <p:sp>
         <p:nvSpPr>
-          <p:cNvPr id="212" name="PlaceHolder 3"/>
+          <p:cNvPr id="210" name="PlaceHolder 3"/>
           <p:cNvSpPr>
             <a:spLocks noGrp="1"/>
           </p:cNvSpPr>
@@ -449,7 +449,7 @@
               </a:lnSpc>
               <a:buNone/>
             </a:pPr>
-            <a:fld id="{BEB76735-3D63-4B65-811F-AB858E533D88}" type="slidenum">
+            <a:fld id="{48FA5B74-BD3C-4BC5-BBD1-9B9FAAF90C23}" type="slidenum">
               <a:rPr b="0" lang="en-US" sz="1800" spc="-1" strike="noStrike">
                 <a:solidFill>
                   <a:srgbClr val="000000"/>
@@ -489,7 +489,7 @@
       </p:grpSpPr>
       <p:sp>
         <p:nvSpPr>
-          <p:cNvPr id="237" name="PlaceHolder 1"/>
+          <p:cNvPr id="235" name="PlaceHolder 1"/>
           <p:cNvSpPr>
             <a:spLocks noGrp="1"/>
           </p:cNvSpPr>
@@ -512,7 +512,7 @@
       </p:sp>
       <p:sp>
         <p:nvSpPr>
-          <p:cNvPr id="238" name="PlaceHolder 2"/>
+          <p:cNvPr id="236" name="PlaceHolder 2"/>
           <p:cNvSpPr>
             <a:spLocks noGrp="1"/>
           </p:cNvSpPr>
@@ -546,7 +546,7 @@
       </p:sp>
       <p:sp>
         <p:nvSpPr>
-          <p:cNvPr id="239" name="PlaceHolder 3"/>
+          <p:cNvPr id="237" name="PlaceHolder 3"/>
           <p:cNvSpPr>
             <a:spLocks noGrp="1"/>
           </p:cNvSpPr>
@@ -593,7 +593,7 @@
               </a:lnSpc>
               <a:buNone/>
             </a:pPr>
-            <a:fld id="{76987C74-85CA-4E62-8A97-C0E9F2E69BC8}" type="slidenum">
+            <a:fld id="{299B8640-C9D2-4CCB-BA3B-7B299CEDAAF7}" type="slidenum">
               <a:rPr b="0" lang="en-US" sz="1800" spc="-1" strike="noStrike">
                 <a:solidFill>
                   <a:srgbClr val="000000"/>
@@ -633,7 +633,7 @@
       </p:grpSpPr>
       <p:sp>
         <p:nvSpPr>
-          <p:cNvPr id="240" name="PlaceHolder 1"/>
+          <p:cNvPr id="238" name="PlaceHolder 1"/>
           <p:cNvSpPr>
             <a:spLocks noGrp="1"/>
           </p:cNvSpPr>
@@ -656,7 +656,7 @@
       </p:sp>
       <p:sp>
         <p:nvSpPr>
-          <p:cNvPr id="241" name="PlaceHolder 2"/>
+          <p:cNvPr id="239" name="PlaceHolder 2"/>
           <p:cNvSpPr>
             <a:spLocks noGrp="1"/>
           </p:cNvSpPr>
@@ -690,7 +690,7 @@
       </p:sp>
       <p:sp>
         <p:nvSpPr>
-          <p:cNvPr id="242" name="PlaceHolder 3"/>
+          <p:cNvPr id="240" name="PlaceHolder 3"/>
           <p:cNvSpPr>
             <a:spLocks noGrp="1"/>
           </p:cNvSpPr>
@@ -737,7 +737,7 @@
               </a:lnSpc>
               <a:buNone/>
             </a:pPr>
-            <a:fld id="{AA778DA0-B373-4F00-A975-463D7F56AAA3}" type="slidenum">
+            <a:fld id="{62170768-5FAB-4EE4-9F1B-604F5F9A4BCF}" type="slidenum">
               <a:rPr b="0" lang="en-US" sz="1800" spc="-1" strike="noStrike">
                 <a:solidFill>
                   <a:srgbClr val="000000"/>
@@ -777,7 +777,7 @@
       </p:grpSpPr>
       <p:sp>
         <p:nvSpPr>
-          <p:cNvPr id="243" name="PlaceHolder 1"/>
+          <p:cNvPr id="241" name="PlaceHolder 1"/>
           <p:cNvSpPr>
             <a:spLocks noGrp="1"/>
           </p:cNvSpPr>
@@ -800,7 +800,7 @@
       </p:sp>
       <p:sp>
         <p:nvSpPr>
-          <p:cNvPr id="244" name="PlaceHolder 2"/>
+          <p:cNvPr id="242" name="PlaceHolder 2"/>
           <p:cNvSpPr>
             <a:spLocks noGrp="1"/>
           </p:cNvSpPr>
@@ -834,7 +834,7 @@
       </p:sp>
       <p:sp>
         <p:nvSpPr>
-          <p:cNvPr id="245" name="PlaceHolder 3"/>
+          <p:cNvPr id="243" name="PlaceHolder 3"/>
           <p:cNvSpPr>
             <a:spLocks noGrp="1"/>
           </p:cNvSpPr>
@@ -881,7 +881,7 @@
               </a:lnSpc>
               <a:buNone/>
             </a:pPr>
-            <a:fld id="{F4589604-9D88-4ACC-B3B3-E0620875883A}" type="slidenum">
+            <a:fld id="{9F997464-90C7-440A-BC09-CA65AFCC54AF}" type="slidenum">
               <a:rPr b="0" lang="en-US" sz="1800" spc="-1" strike="noStrike">
                 <a:solidFill>
                   <a:srgbClr val="000000"/>
@@ -921,7 +921,7 @@
       </p:grpSpPr>
       <p:sp>
         <p:nvSpPr>
-          <p:cNvPr id="246" name="PlaceHolder 1"/>
+          <p:cNvPr id="244" name="PlaceHolder 1"/>
           <p:cNvSpPr>
             <a:spLocks noGrp="1"/>
           </p:cNvSpPr>
@@ -944,7 +944,7 @@
       </p:sp>
       <p:sp>
         <p:nvSpPr>
-          <p:cNvPr id="247" name="PlaceHolder 2"/>
+          <p:cNvPr id="245" name="PlaceHolder 2"/>
           <p:cNvSpPr>
             <a:spLocks noGrp="1"/>
           </p:cNvSpPr>
@@ -978,7 +978,7 @@
       </p:sp>
       <p:sp>
         <p:nvSpPr>
-          <p:cNvPr id="248" name="PlaceHolder 3"/>
+          <p:cNvPr id="246" name="PlaceHolder 3"/>
           <p:cNvSpPr>
             <a:spLocks noGrp="1"/>
           </p:cNvSpPr>
@@ -1025,7 +1025,7 @@
               </a:lnSpc>
               <a:buNone/>
             </a:pPr>
-            <a:fld id="{72051AC6-FABD-42CE-86EB-77BA53BB3E3A}" type="slidenum">
+            <a:fld id="{2ED58890-B588-494F-A667-FEDFBB75D4C5}" type="slidenum">
               <a:rPr b="0" lang="en-US" sz="1800" spc="-1" strike="noStrike">
                 <a:solidFill>
                   <a:srgbClr val="000000"/>
@@ -1065,7 +1065,7 @@
       </p:grpSpPr>
       <p:sp>
         <p:nvSpPr>
-          <p:cNvPr id="249" name="PlaceHolder 1"/>
+          <p:cNvPr id="247" name="PlaceHolder 1"/>
           <p:cNvSpPr>
             <a:spLocks noGrp="1"/>
           </p:cNvSpPr>
@@ -1088,7 +1088,7 @@
       </p:sp>
       <p:sp>
         <p:nvSpPr>
-          <p:cNvPr id="250" name="PlaceHolder 2"/>
+          <p:cNvPr id="248" name="PlaceHolder 2"/>
           <p:cNvSpPr>
             <a:spLocks noGrp="1"/>
           </p:cNvSpPr>
@@ -1122,7 +1122,7 @@
       </p:sp>
       <p:sp>
         <p:nvSpPr>
-          <p:cNvPr id="251" name="PlaceHolder 3"/>
+          <p:cNvPr id="249" name="PlaceHolder 3"/>
           <p:cNvSpPr>
             <a:spLocks noGrp="1"/>
           </p:cNvSpPr>
@@ -1169,7 +1169,7 @@
               </a:lnSpc>
               <a:buNone/>
             </a:pPr>
-            <a:fld id="{15F02FBE-631F-4735-918F-CD13F19E7125}" type="slidenum">
+            <a:fld id="{5FE742A7-2CDE-45F4-BB99-1A14CA5AFD7D}" type="slidenum">
               <a:rPr b="0" lang="en-US" sz="1800" spc="-1" strike="noStrike">
                 <a:solidFill>
                   <a:srgbClr val="000000"/>
@@ -1209,7 +1209,7 @@
       </p:grpSpPr>
       <p:sp>
         <p:nvSpPr>
-          <p:cNvPr id="213" name="PlaceHolder 1"/>
+          <p:cNvPr id="211" name="PlaceHolder 1"/>
           <p:cNvSpPr>
             <a:spLocks noGrp="1"/>
           </p:cNvSpPr>
@@ -1232,7 +1232,7 @@
       </p:sp>
       <p:sp>
         <p:nvSpPr>
-          <p:cNvPr id="214" name="PlaceHolder 2"/>
+          <p:cNvPr id="212" name="PlaceHolder 2"/>
           <p:cNvSpPr>
             <a:spLocks noGrp="1"/>
           </p:cNvSpPr>
@@ -1266,7 +1266,7 @@
       </p:sp>
       <p:sp>
         <p:nvSpPr>
-          <p:cNvPr id="215" name="PlaceHolder 3"/>
+          <p:cNvPr id="213" name="PlaceHolder 3"/>
           <p:cNvSpPr>
             <a:spLocks noGrp="1"/>
           </p:cNvSpPr>
@@ -1313,7 +1313,7 @@
               </a:lnSpc>
               <a:buNone/>
             </a:pPr>
-            <a:fld id="{1B4546E1-AD68-4847-AAAF-96BA960A46DC}" type="slidenum">
+            <a:fld id="{70DBB6E1-DDBA-4321-A022-21CE06CDF53B}" type="slidenum">
               <a:rPr b="0" lang="en-US" sz="1800" spc="-1" strike="noStrike">
                 <a:solidFill>
                   <a:srgbClr val="000000"/>
@@ -1353,7 +1353,7 @@
       </p:grpSpPr>
       <p:sp>
         <p:nvSpPr>
-          <p:cNvPr id="216" name="PlaceHolder 1"/>
+          <p:cNvPr id="214" name="PlaceHolder 1"/>
           <p:cNvSpPr>
             <a:spLocks noGrp="1"/>
           </p:cNvSpPr>
@@ -1376,7 +1376,7 @@
       </p:sp>
       <p:sp>
         <p:nvSpPr>
-          <p:cNvPr id="217" name="PlaceHolder 2"/>
+          <p:cNvPr id="215" name="PlaceHolder 2"/>
           <p:cNvSpPr>
             <a:spLocks noGrp="1"/>
           </p:cNvSpPr>
@@ -1410,7 +1410,7 @@
       </p:sp>
       <p:sp>
         <p:nvSpPr>
-          <p:cNvPr id="218" name="PlaceHolder 3"/>
+          <p:cNvPr id="216" name="PlaceHolder 3"/>
           <p:cNvSpPr>
             <a:spLocks noGrp="1"/>
           </p:cNvSpPr>
@@ -1457,7 +1457,7 @@
               </a:lnSpc>
               <a:buNone/>
             </a:pPr>
-            <a:fld id="{1F498E17-CD98-4C43-8C99-F2D824C9BAD2}" type="slidenum">
+            <a:fld id="{9D804061-A884-49DF-AC95-255FE4DB3D04}" type="slidenum">
               <a:rPr b="0" lang="en-US" sz="1800" spc="-1" strike="noStrike">
                 <a:solidFill>
                   <a:srgbClr val="000000"/>
@@ -1497,7 +1497,7 @@
       </p:grpSpPr>
       <p:sp>
         <p:nvSpPr>
-          <p:cNvPr id="219" name="PlaceHolder 1"/>
+          <p:cNvPr id="217" name="PlaceHolder 1"/>
           <p:cNvSpPr>
             <a:spLocks noGrp="1"/>
           </p:cNvSpPr>
@@ -1520,7 +1520,7 @@
       </p:sp>
       <p:sp>
         <p:nvSpPr>
-          <p:cNvPr id="220" name="PlaceHolder 2"/>
+          <p:cNvPr id="218" name="PlaceHolder 2"/>
           <p:cNvSpPr>
             <a:spLocks noGrp="1"/>
           </p:cNvSpPr>
@@ -1554,7 +1554,7 @@
       </p:sp>
       <p:sp>
         <p:nvSpPr>
-          <p:cNvPr id="221" name="PlaceHolder 3"/>
+          <p:cNvPr id="219" name="PlaceHolder 3"/>
           <p:cNvSpPr>
             <a:spLocks noGrp="1"/>
           </p:cNvSpPr>
@@ -1601,7 +1601,7 @@
               </a:lnSpc>
               <a:buNone/>
             </a:pPr>
-            <a:fld id="{EDA10C04-3260-41B3-935C-E07C9804A92A}" type="slidenum">
+            <a:fld id="{75FFCC1B-A7D5-4FEF-9DEA-3984A9F6683D}" type="slidenum">
               <a:rPr b="0" lang="en-US" sz="1800" spc="-1" strike="noStrike">
                 <a:solidFill>
                   <a:srgbClr val="000000"/>
@@ -1641,7 +1641,7 @@
       </p:grpSpPr>
       <p:sp>
         <p:nvSpPr>
-          <p:cNvPr id="222" name="PlaceHolder 1"/>
+          <p:cNvPr id="220" name="PlaceHolder 1"/>
           <p:cNvSpPr>
             <a:spLocks noGrp="1"/>
           </p:cNvSpPr>
@@ -1664,7 +1664,7 @@
       </p:sp>
       <p:sp>
         <p:nvSpPr>
-          <p:cNvPr id="223" name="PlaceHolder 2"/>
+          <p:cNvPr id="221" name="PlaceHolder 2"/>
           <p:cNvSpPr>
             <a:spLocks noGrp="1"/>
           </p:cNvSpPr>
@@ -1698,7 +1698,7 @@
       </p:sp>
       <p:sp>
         <p:nvSpPr>
-          <p:cNvPr id="224" name="PlaceHolder 3"/>
+          <p:cNvPr id="222" name="PlaceHolder 3"/>
           <p:cNvSpPr>
             <a:spLocks noGrp="1"/>
           </p:cNvSpPr>
@@ -1745,7 +1745,7 @@
               </a:lnSpc>
               <a:buNone/>
             </a:pPr>
-            <a:fld id="{0CE36401-3A5E-426E-9E54-34FB5527CC96}" type="slidenum">
+            <a:fld id="{CD8E8E74-B066-4D6C-8CF2-543464517ED4}" type="slidenum">
               <a:rPr b="0" lang="en-US" sz="1800" spc="-1" strike="noStrike">
                 <a:solidFill>
                   <a:srgbClr val="000000"/>
@@ -1785,7 +1785,7 @@
       </p:grpSpPr>
       <p:sp>
         <p:nvSpPr>
-          <p:cNvPr id="225" name="PlaceHolder 1"/>
+          <p:cNvPr id="223" name="PlaceHolder 1"/>
           <p:cNvSpPr>
             <a:spLocks noGrp="1"/>
           </p:cNvSpPr>
@@ -1808,7 +1808,7 @@
       </p:sp>
       <p:sp>
         <p:nvSpPr>
-          <p:cNvPr id="226" name="PlaceHolder 2"/>
+          <p:cNvPr id="224" name="PlaceHolder 2"/>
           <p:cNvSpPr>
             <a:spLocks noGrp="1"/>
           </p:cNvSpPr>
@@ -1842,7 +1842,7 @@
       </p:sp>
       <p:sp>
         <p:nvSpPr>
-          <p:cNvPr id="227" name="PlaceHolder 3"/>
+          <p:cNvPr id="225" name="PlaceHolder 3"/>
           <p:cNvSpPr>
             <a:spLocks noGrp="1"/>
           </p:cNvSpPr>
@@ -1889,7 +1889,7 @@
               </a:lnSpc>
               <a:buNone/>
             </a:pPr>
-            <a:fld id="{A79BF64D-8464-4496-949D-895DEE9EE6C1}" type="slidenum">
+            <a:fld id="{9BE8EB17-28E4-4843-AA64-A5A7AE0262CE}" type="slidenum">
               <a:rPr b="0" lang="en-US" sz="1800" spc="-1" strike="noStrike">
                 <a:solidFill>
                   <a:srgbClr val="000000"/>
@@ -1929,7 +1929,7 @@
       </p:grpSpPr>
       <p:sp>
         <p:nvSpPr>
-          <p:cNvPr id="228" name="PlaceHolder 1"/>
+          <p:cNvPr id="226" name="PlaceHolder 1"/>
           <p:cNvSpPr>
             <a:spLocks noGrp="1"/>
           </p:cNvSpPr>
@@ -1952,7 +1952,7 @@
       </p:sp>
       <p:sp>
         <p:nvSpPr>
-          <p:cNvPr id="229" name="PlaceHolder 2"/>
+          <p:cNvPr id="227" name="PlaceHolder 2"/>
           <p:cNvSpPr>
             <a:spLocks noGrp="1"/>
           </p:cNvSpPr>
@@ -1986,7 +1986,7 @@
       </p:sp>
       <p:sp>
         <p:nvSpPr>
-          <p:cNvPr id="230" name="PlaceHolder 3"/>
+          <p:cNvPr id="228" name="PlaceHolder 3"/>
           <p:cNvSpPr>
             <a:spLocks noGrp="1"/>
           </p:cNvSpPr>
@@ -2033,7 +2033,7 @@
               </a:lnSpc>
               <a:buNone/>
             </a:pPr>
-            <a:fld id="{E810D920-145F-47D4-B0B0-4869CEE890D0}" type="slidenum">
+            <a:fld id="{4DAF8F04-2F9E-49A4-A10D-FEBE3505B2DF}" type="slidenum">
               <a:rPr b="0" lang="en-US" sz="1800" spc="-1" strike="noStrike">
                 <a:solidFill>
                   <a:srgbClr val="000000"/>
@@ -2073,7 +2073,7 @@
       </p:grpSpPr>
       <p:sp>
         <p:nvSpPr>
-          <p:cNvPr id="231" name="PlaceHolder 1"/>
+          <p:cNvPr id="229" name="PlaceHolder 1"/>
           <p:cNvSpPr>
             <a:spLocks noGrp="1"/>
           </p:cNvSpPr>
@@ -2096,7 +2096,7 @@
       </p:sp>
       <p:sp>
         <p:nvSpPr>
-          <p:cNvPr id="232" name="PlaceHolder 2"/>
+          <p:cNvPr id="230" name="PlaceHolder 2"/>
           <p:cNvSpPr>
             <a:spLocks noGrp="1"/>
           </p:cNvSpPr>
@@ -2130,7 +2130,7 @@
       </p:sp>
       <p:sp>
         <p:nvSpPr>
-          <p:cNvPr id="233" name="PlaceHolder 3"/>
+          <p:cNvPr id="231" name="PlaceHolder 3"/>
           <p:cNvSpPr>
             <a:spLocks noGrp="1"/>
           </p:cNvSpPr>
@@ -2177,7 +2177,7 @@
               </a:lnSpc>
               <a:buNone/>
             </a:pPr>
-            <a:fld id="{9827DBA9-BF58-490C-AB7C-CAD57A9BF32B}" type="slidenum">
+            <a:fld id="{C146D146-AF75-4465-9D12-AEE561B981CD}" type="slidenum">
               <a:rPr b="0" lang="en-US" sz="1800" spc="-1" strike="noStrike">
                 <a:solidFill>
                   <a:srgbClr val="000000"/>
@@ -2217,7 +2217,7 @@
       </p:grpSpPr>
       <p:sp>
         <p:nvSpPr>
-          <p:cNvPr id="234" name="PlaceHolder 1"/>
+          <p:cNvPr id="232" name="PlaceHolder 1"/>
           <p:cNvSpPr>
             <a:spLocks noGrp="1"/>
           </p:cNvSpPr>
@@ -2240,7 +2240,7 @@
       </p:sp>
       <p:sp>
         <p:nvSpPr>
-          <p:cNvPr id="235" name="PlaceHolder 2"/>
+          <p:cNvPr id="233" name="PlaceHolder 2"/>
           <p:cNvSpPr>
             <a:spLocks noGrp="1"/>
           </p:cNvSpPr>
@@ -2274,7 +2274,7 @@
       </p:sp>
       <p:sp>
         <p:nvSpPr>
-          <p:cNvPr id="236" name="PlaceHolder 3"/>
+          <p:cNvPr id="234" name="PlaceHolder 3"/>
           <p:cNvSpPr>
             <a:spLocks noGrp="1"/>
           </p:cNvSpPr>
@@ -2321,7 +2321,7 @@
               </a:lnSpc>
               <a:buNone/>
             </a:pPr>
-            <a:fld id="{EDC44EAB-6731-4A43-B25F-73DDA694EAB9}" type="slidenum">
+            <a:fld id="{E59D1F3E-1A36-46BE-9380-F6D506D1667E}" type="slidenum">
               <a:rPr b="0" lang="en-US" sz="1800" spc="-1" strike="noStrike">
                 <a:solidFill>
                   <a:srgbClr val="000000"/>
@@ -4364,7 +4364,7 @@
         <p:spPr>
           <a:xfrm>
             <a:off x="457200" y="4027680"/>
-            <a:ext cx="10515600" cy="2144520"/>
+            <a:ext cx="10928880" cy="2030760"/>
           </a:xfrm>
           <a:prstGeom prst="rect">
             <a:avLst/>
@@ -4395,7 +4395,7 @@
               </a:tabLst>
             </a:pPr>
             <a:r>
-              <a:rPr b="1" lang="en-US" sz="4000" spc="-1" strike="noStrike">
+              <a:rPr b="1" lang="en-US" sz="4800" spc="-1" strike="noStrike">
                 <a:solidFill>
                   <a:srgbClr val="ffffff"/>
                 </a:solidFill>
@@ -4404,7 +4404,7 @@
               </a:rPr>
               <a:t>TITLE</a:t>
             </a:r>
-            <a:endParaRPr b="0" lang="en-US" sz="4000" spc="-1" strike="noStrike">
+            <a:endParaRPr b="0" lang="en-US" sz="4800" spc="-1" strike="noStrike">
               <a:latin typeface="Arial"/>
             </a:endParaRPr>
           </a:p>
@@ -4472,7 +4472,7 @@
       </p:grpSpPr>
       <p:sp>
         <p:nvSpPr>
-          <p:cNvPr id="150" name="PIC"/>
+          <p:cNvPr id="148" name="PIC"/>
           <p:cNvSpPr/>
           <p:nvPr/>
         </p:nvSpPr>
@@ -4528,7 +4528,7 @@
       </p:sp>
       <p:sp>
         <p:nvSpPr>
-          <p:cNvPr id="151" name="Линия_1"/>
+          <p:cNvPr id="149" name="Линия_1"/>
           <p:cNvSpPr/>
           <p:nvPr/>
         </p:nvSpPr>
@@ -4556,7 +4556,7 @@
       </p:sp>
       <p:sp>
         <p:nvSpPr>
-          <p:cNvPr id="152" name="SUBTITLE 2"/>
+          <p:cNvPr id="150" name="SUBTITLE 2"/>
           <p:cNvSpPr/>
           <p:nvPr/>
         </p:nvSpPr>
@@ -4611,7 +4611,7 @@
       </p:sp>
       <p:sp>
         <p:nvSpPr>
-          <p:cNvPr id="153" name="TEXT 2"/>
+          <p:cNvPr id="151" name="TEXT 2"/>
           <p:cNvSpPr/>
           <p:nvPr/>
         </p:nvSpPr>
@@ -4666,7 +4666,7 @@
       </p:sp>
       <p:pic>
         <p:nvPicPr>
-          <p:cNvPr id="154" name="Кнопка_Навигация_Фон" descr="/home/claude/vistas/assets/grad_circle.png"/>
+          <p:cNvPr id="152" name="Кнопка_Навигация_Фон" descr="/home/claude/vistas/assets/grad_circle.png"/>
           <p:cNvPicPr/>
           <p:nvPr/>
         </p:nvPicPr>
@@ -4689,7 +4689,7 @@
       </p:pic>
       <p:sp>
         <p:nvSpPr>
-          <p:cNvPr id="155" name="Кнопка_Навигация_Стрелка"/>
+          <p:cNvPr id="153" name="Кнопка_Навигация_Стрелка"/>
           <p:cNvSpPr/>
           <p:nvPr/>
         </p:nvSpPr>
@@ -4744,7 +4744,7 @@
       </p:sp>
       <p:sp>
         <p:nvSpPr>
-          <p:cNvPr id="156" name="TITLE"/>
+          <p:cNvPr id="154" name="TITLE"/>
           <p:cNvSpPr/>
           <p:nvPr/>
         </p:nvSpPr>
@@ -4799,7 +4799,7 @@
       </p:sp>
       <p:sp>
         <p:nvSpPr>
-          <p:cNvPr id="157" name="Иконка_1"/>
+          <p:cNvPr id="155" name="Иконка_1"/>
           <p:cNvSpPr/>
           <p:nvPr/>
         </p:nvSpPr>
@@ -4832,7 +4832,7 @@
       </p:sp>
       <p:pic>
         <p:nvPicPr>
-          <p:cNvPr id="158" name="Иконка_1_Акцент" descr="/home/claude/vistas/assets/grad_square.png"/>
+          <p:cNvPr id="156" name="Иконка_1_Акцент" descr="/home/claude/vistas/assets/grad_square.png"/>
           <p:cNvPicPr/>
           <p:nvPr/>
         </p:nvPicPr>
@@ -4855,7 +4855,7 @@
       </p:pic>
       <p:sp>
         <p:nvSpPr>
-          <p:cNvPr id="159" name="Линия_1"/>
+          <p:cNvPr id="157" name="Линия_1"/>
           <p:cNvSpPr/>
           <p:nvPr/>
         </p:nvSpPr>
@@ -4883,7 +4883,7 @@
       </p:sp>
       <p:sp>
         <p:nvSpPr>
-          <p:cNvPr id="160" name="SUBTITLE 2"/>
+          <p:cNvPr id="158" name="SUBTITLE 2"/>
           <p:cNvSpPr/>
           <p:nvPr/>
         </p:nvSpPr>
@@ -4938,7 +4938,7 @@
       </p:sp>
       <p:sp>
         <p:nvSpPr>
-          <p:cNvPr id="161" name="TEXT 2"/>
+          <p:cNvPr id="159" name="TEXT 2"/>
           <p:cNvSpPr/>
           <p:nvPr/>
         </p:nvSpPr>
@@ -4993,7 +4993,7 @@
       </p:sp>
       <p:sp>
         <p:nvSpPr>
-          <p:cNvPr id="162" name="Иконка_1"/>
+          <p:cNvPr id="160" name="Иконка_1"/>
           <p:cNvSpPr/>
           <p:nvPr/>
         </p:nvSpPr>
@@ -5026,7 +5026,7 @@
       </p:sp>
       <p:pic>
         <p:nvPicPr>
-          <p:cNvPr id="163" name="Иконка_1_Акцент" descr="/home/claude/vistas/assets/grad_square.png"/>
+          <p:cNvPr id="161" name="Иконка_1_Акцент" descr="/home/claude/vistas/assets/grad_square.png"/>
           <p:cNvPicPr/>
           <p:nvPr/>
         </p:nvPicPr>
@@ -5049,7 +5049,7 @@
       </p:pic>
       <p:sp>
         <p:nvSpPr>
-          <p:cNvPr id="164" name="Линия_1"/>
+          <p:cNvPr id="162" name="Линия_1"/>
           <p:cNvSpPr/>
           <p:nvPr/>
         </p:nvSpPr>
@@ -5077,7 +5077,7 @@
       </p:sp>
       <p:sp>
         <p:nvSpPr>
-          <p:cNvPr id="165" name="SUBTITLE 2"/>
+          <p:cNvPr id="163" name="SUBTITLE 2"/>
           <p:cNvSpPr/>
           <p:nvPr/>
         </p:nvSpPr>
@@ -5132,7 +5132,7 @@
       </p:sp>
       <p:sp>
         <p:nvSpPr>
-          <p:cNvPr id="166" name="TEXT 2"/>
+          <p:cNvPr id="164" name="TEXT 2"/>
           <p:cNvSpPr/>
           <p:nvPr/>
         </p:nvSpPr>
@@ -5187,7 +5187,7 @@
       </p:sp>
       <p:sp>
         <p:nvSpPr>
-          <p:cNvPr id="167" name="Иконка_1"/>
+          <p:cNvPr id="165" name="Иконка_1"/>
           <p:cNvSpPr/>
           <p:nvPr/>
         </p:nvSpPr>
@@ -5220,7 +5220,7 @@
       </p:sp>
       <p:pic>
         <p:nvPicPr>
-          <p:cNvPr id="168" name="Иконка_1_Акцент" descr="/home/claude/vistas/assets/grad_square.png"/>
+          <p:cNvPr id="166" name="Иконка_1_Акцент" descr="/home/claude/vistas/assets/grad_square.png"/>
           <p:cNvPicPr/>
           <p:nvPr/>
         </p:nvPicPr>
@@ -5280,7 +5280,7 @@
       </p:grpSpPr>
       <p:sp>
         <p:nvSpPr>
-          <p:cNvPr id="169" name="PIC"/>
+          <p:cNvPr id="167" name="PIC"/>
           <p:cNvSpPr/>
           <p:nvPr/>
         </p:nvSpPr>
@@ -5336,7 +5336,7 @@
       </p:sp>
       <p:sp>
         <p:nvSpPr>
-          <p:cNvPr id="170" name="TITLE"/>
+          <p:cNvPr id="168" name="TITLE"/>
           <p:cNvSpPr/>
           <p:nvPr/>
         </p:nvSpPr>
@@ -5391,7 +5391,7 @@
       </p:sp>
       <p:sp>
         <p:nvSpPr>
-          <p:cNvPr id="171" name="SUBTITLE 1"/>
+          <p:cNvPr id="169" name="SUBTITLE 1"/>
           <p:cNvSpPr/>
           <p:nvPr/>
         </p:nvSpPr>
@@ -5446,7 +5446,7 @@
       </p:sp>
       <p:sp>
         <p:nvSpPr>
-          <p:cNvPr id="172" name="TEXT 1"/>
+          <p:cNvPr id="170" name="TEXT 1"/>
           <p:cNvSpPr/>
           <p:nvPr/>
         </p:nvSpPr>
@@ -5521,7 +5521,7 @@
       </p:sp>
       <p:sp>
         <p:nvSpPr>
-          <p:cNvPr id="173" name="SUBTITLE 2"/>
+          <p:cNvPr id="171" name="SUBTITLE 2"/>
           <p:cNvSpPr/>
           <p:nvPr/>
         </p:nvSpPr>
@@ -5576,7 +5576,7 @@
       </p:sp>
       <p:sp>
         <p:nvSpPr>
-          <p:cNvPr id="174" name="TEXT 2"/>
+          <p:cNvPr id="172" name="TEXT 2"/>
           <p:cNvSpPr/>
           <p:nvPr/>
         </p:nvSpPr>
@@ -5631,7 +5631,7 @@
       </p:sp>
       <p:sp>
         <p:nvSpPr>
-          <p:cNvPr id="175" name="SUBTITLE 2"/>
+          <p:cNvPr id="173" name="SUBTITLE 2"/>
           <p:cNvSpPr/>
           <p:nvPr/>
         </p:nvSpPr>
@@ -5686,7 +5686,7 @@
       </p:sp>
       <p:sp>
         <p:nvSpPr>
-          <p:cNvPr id="176" name="TEXT 2"/>
+          <p:cNvPr id="174" name="TEXT 2"/>
           <p:cNvSpPr/>
           <p:nvPr/>
         </p:nvSpPr>
@@ -5778,7 +5778,7 @@
       </p:grpSpPr>
       <p:pic>
         <p:nvPicPr>
-          <p:cNvPr id="177" name="Кнопка_Навигация_Фон" descr="/home/claude/vistas/assets/grad_circle.png"/>
+          <p:cNvPr id="175" name="Кнопка_Навигация_Фон" descr="/home/claude/vistas/assets/grad_circle.png"/>
           <p:cNvPicPr/>
           <p:nvPr/>
         </p:nvPicPr>
@@ -5801,7 +5801,7 @@
       </p:pic>
       <p:sp>
         <p:nvSpPr>
-          <p:cNvPr id="178" name="Кнопка_Навигация_Стрелка"/>
+          <p:cNvPr id="176" name="Кнопка_Навигация_Стрелка"/>
           <p:cNvSpPr/>
           <p:nvPr/>
         </p:nvSpPr>
@@ -5856,7 +5856,7 @@
       </p:sp>
       <p:sp>
         <p:nvSpPr>
-          <p:cNvPr id="179" name="PIC 1"/>
+          <p:cNvPr id="177" name="PIC 1"/>
           <p:cNvSpPr/>
           <p:nvPr/>
         </p:nvSpPr>
@@ -5914,7 +5914,7 @@
       </p:sp>
       <p:sp>
         <p:nvSpPr>
-          <p:cNvPr id="180" name="SUBTITLE 1"/>
+          <p:cNvPr id="178" name="SUBTITLE 1"/>
           <p:cNvSpPr/>
           <p:nvPr/>
         </p:nvSpPr>
@@ -5969,7 +5969,7 @@
       </p:sp>
       <p:sp>
         <p:nvSpPr>
-          <p:cNvPr id="181" name="TEXT 1"/>
+          <p:cNvPr id="179" name="TEXT 1"/>
           <p:cNvSpPr/>
           <p:nvPr/>
         </p:nvSpPr>
@@ -6024,7 +6024,7 @@
       </p:sp>
       <p:sp>
         <p:nvSpPr>
-          <p:cNvPr id="182" name="PIC 2"/>
+          <p:cNvPr id="180" name="PIC 2"/>
           <p:cNvSpPr/>
           <p:nvPr/>
         </p:nvSpPr>
@@ -6082,7 +6082,7 @@
       </p:sp>
       <p:sp>
         <p:nvSpPr>
-          <p:cNvPr id="183" name="SUBTITLE 2"/>
+          <p:cNvPr id="181" name="SUBTITLE 2"/>
           <p:cNvSpPr/>
           <p:nvPr/>
         </p:nvSpPr>
@@ -6137,7 +6137,7 @@
       </p:sp>
       <p:sp>
         <p:nvSpPr>
-          <p:cNvPr id="184" name="TEXT 2"/>
+          <p:cNvPr id="182" name="TEXT 2"/>
           <p:cNvSpPr/>
           <p:nvPr/>
         </p:nvSpPr>
@@ -6192,7 +6192,7 @@
       </p:sp>
       <p:sp>
         <p:nvSpPr>
-          <p:cNvPr id="185" name="PIC 3"/>
+          <p:cNvPr id="183" name="PIC 3"/>
           <p:cNvSpPr/>
           <p:nvPr/>
         </p:nvSpPr>
@@ -6250,7 +6250,7 @@
       </p:sp>
       <p:sp>
         <p:nvSpPr>
-          <p:cNvPr id="186" name="SUBTITLE 3"/>
+          <p:cNvPr id="184" name="SUBTITLE 3"/>
           <p:cNvSpPr/>
           <p:nvPr/>
         </p:nvSpPr>
@@ -6305,7 +6305,7 @@
       </p:sp>
       <p:sp>
         <p:nvSpPr>
-          <p:cNvPr id="187" name="TEXT 3"/>
+          <p:cNvPr id="185" name="TEXT 3"/>
           <p:cNvSpPr/>
           <p:nvPr/>
         </p:nvSpPr>
@@ -6360,7 +6360,7 @@
       </p:sp>
       <p:sp>
         <p:nvSpPr>
-          <p:cNvPr id="188" name="TITLE"/>
+          <p:cNvPr id="186" name="TITLE"/>
           <p:cNvSpPr/>
           <p:nvPr/>
         </p:nvSpPr>
@@ -6452,7 +6452,7 @@
       </p:grpSpPr>
       <p:sp>
         <p:nvSpPr>
-          <p:cNvPr id="189" name="PIC"/>
+          <p:cNvPr id="187" name="PIC"/>
           <p:cNvSpPr/>
           <p:nvPr/>
         </p:nvSpPr>
@@ -6508,7 +6508,7 @@
       </p:sp>
       <p:sp>
         <p:nvSpPr>
-          <p:cNvPr id="190" name="Линия_1"/>
+          <p:cNvPr id="188" name="Линия_1"/>
           <p:cNvSpPr/>
           <p:nvPr/>
         </p:nvSpPr>
@@ -6536,7 +6536,7 @@
       </p:sp>
       <p:sp>
         <p:nvSpPr>
-          <p:cNvPr id="191" name="SUBTITLE 2"/>
+          <p:cNvPr id="189" name="SUBTITLE 2"/>
           <p:cNvSpPr/>
           <p:nvPr/>
         </p:nvSpPr>
@@ -6591,7 +6591,7 @@
       </p:sp>
       <p:sp>
         <p:nvSpPr>
-          <p:cNvPr id="192" name="TEXT 2"/>
+          <p:cNvPr id="190" name="TEXT 2"/>
           <p:cNvSpPr/>
           <p:nvPr/>
         </p:nvSpPr>
@@ -6646,7 +6646,7 @@
       </p:sp>
       <p:pic>
         <p:nvPicPr>
-          <p:cNvPr id="193" name="Кнопка_Навигация_Фон" descr="/home/claude/vistas/assets/grad_circle.png"/>
+          <p:cNvPr id="191" name="Кнопка_Навигация_Фон" descr="/home/claude/vistas/assets/grad_circle.png"/>
           <p:cNvPicPr/>
           <p:nvPr/>
         </p:nvPicPr>
@@ -6669,7 +6669,7 @@
       </p:pic>
       <p:sp>
         <p:nvSpPr>
-          <p:cNvPr id="194" name="Кнопка_Навигация_Стрелка"/>
+          <p:cNvPr id="192" name="Кнопка_Навигация_Стрелка"/>
           <p:cNvSpPr/>
           <p:nvPr/>
         </p:nvSpPr>
@@ -6724,7 +6724,7 @@
       </p:sp>
       <p:sp>
         <p:nvSpPr>
-          <p:cNvPr id="195" name="TITLE"/>
+          <p:cNvPr id="193" name="TITLE"/>
           <p:cNvSpPr/>
           <p:nvPr/>
         </p:nvSpPr>
@@ -6779,7 +6779,7 @@
       </p:sp>
       <p:sp>
         <p:nvSpPr>
-          <p:cNvPr id="196" name="Иконка_1"/>
+          <p:cNvPr id="194" name="Иконка_1"/>
           <p:cNvSpPr/>
           <p:nvPr/>
         </p:nvSpPr>
@@ -6812,7 +6812,7 @@
       </p:sp>
       <p:sp>
         <p:nvSpPr>
-          <p:cNvPr id="197" name="Линия_1"/>
+          <p:cNvPr id="195" name="Линия_1"/>
           <p:cNvSpPr/>
           <p:nvPr/>
         </p:nvSpPr>
@@ -6840,7 +6840,7 @@
       </p:sp>
       <p:sp>
         <p:nvSpPr>
-          <p:cNvPr id="198" name="SUBTITLE 2"/>
+          <p:cNvPr id="196" name="SUBTITLE 2"/>
           <p:cNvSpPr/>
           <p:nvPr/>
         </p:nvSpPr>
@@ -6895,7 +6895,7 @@
       </p:sp>
       <p:sp>
         <p:nvSpPr>
-          <p:cNvPr id="199" name="TEXT 2"/>
+          <p:cNvPr id="197" name="TEXT 2"/>
           <p:cNvSpPr/>
           <p:nvPr/>
         </p:nvSpPr>
@@ -6950,7 +6950,7 @@
       </p:sp>
       <p:sp>
         <p:nvSpPr>
-          <p:cNvPr id="200" name="Иконка_1"/>
+          <p:cNvPr id="198" name="Иконка_1"/>
           <p:cNvSpPr/>
           <p:nvPr/>
         </p:nvSpPr>
@@ -6983,7 +6983,7 @@
       </p:sp>
       <p:sp>
         <p:nvSpPr>
-          <p:cNvPr id="201" name="Линия_1"/>
+          <p:cNvPr id="199" name="Линия_1"/>
           <p:cNvSpPr/>
           <p:nvPr/>
         </p:nvSpPr>
@@ -7011,7 +7011,7 @@
       </p:sp>
       <p:sp>
         <p:nvSpPr>
-          <p:cNvPr id="202" name="SUBTITLE 2"/>
+          <p:cNvPr id="200" name="SUBTITLE 2"/>
           <p:cNvSpPr/>
           <p:nvPr/>
         </p:nvSpPr>
@@ -7066,7 +7066,7 @@
       </p:sp>
       <p:sp>
         <p:nvSpPr>
-          <p:cNvPr id="203" name="TEXT 2"/>
+          <p:cNvPr id="201" name="TEXT 2"/>
           <p:cNvSpPr/>
           <p:nvPr/>
         </p:nvSpPr>
@@ -7121,7 +7121,7 @@
       </p:sp>
       <p:sp>
         <p:nvSpPr>
-          <p:cNvPr id="204" name="Иконка_1"/>
+          <p:cNvPr id="202" name="Иконка_1"/>
           <p:cNvSpPr/>
           <p:nvPr/>
         </p:nvSpPr>
@@ -7154,7 +7154,7 @@
       </p:sp>
       <p:sp>
         <p:nvSpPr>
-          <p:cNvPr id="205" name="SUBTITLE 2"/>
+          <p:cNvPr id="203" name="SUBTITLE 2"/>
           <p:cNvSpPr/>
           <p:nvPr/>
         </p:nvSpPr>
@@ -7209,7 +7209,7 @@
       </p:sp>
       <p:sp>
         <p:nvSpPr>
-          <p:cNvPr id="206" name="SUBTITLE 2"/>
+          <p:cNvPr id="204" name="SUBTITLE 2"/>
           <p:cNvSpPr/>
           <p:nvPr/>
         </p:nvSpPr>
@@ -7264,7 +7264,7 @@
       </p:sp>
       <p:sp>
         <p:nvSpPr>
-          <p:cNvPr id="207" name="SUBTITLE 2"/>
+          <p:cNvPr id="205" name="SUBTITLE 2"/>
           <p:cNvSpPr/>
           <p:nvPr/>
         </p:nvSpPr>
@@ -7356,7 +7356,7 @@
       </p:grpSpPr>
       <p:pic>
         <p:nvPicPr>
-          <p:cNvPr id="208" name="Градиент_Фон" descr="/home/claude/vistas/assets/grad_full_diagonal.png"/>
+          <p:cNvPr id="206" name="Градиент_Фон" descr="/home/claude/vistas/assets/grad_full_diagonal.png"/>
           <p:cNvPicPr/>
           <p:nvPr/>
         </p:nvPicPr>
@@ -7379,7 +7379,7 @@
       </p:pic>
       <p:sp>
         <p:nvSpPr>
-          <p:cNvPr id="209" name="TITLE"/>
+          <p:cNvPr id="207" name="TITLE"/>
           <p:cNvSpPr/>
           <p:nvPr/>
         </p:nvSpPr>
@@ -10660,67 +10660,14 @@
       </p:grpSpPr>
       <p:sp>
         <p:nvSpPr>
-          <p:cNvPr id="110" name="Затемнение"/>
-          <p:cNvSpPr/>
-          <p:nvPr/>
-        </p:nvSpPr>
-        <p:spPr>
-          <a:xfrm>
-            <a:off x="0" y="1328040"/>
-            <a:ext cx="12188520" cy="5529600"/>
-          </a:xfrm>
-          <a:prstGeom prst="rect">
-            <a:avLst/>
-          </a:prstGeom>
-          <a:solidFill>
-            <a:srgbClr val="d9d9d9"/>
-          </a:solidFill>
-          <a:ln w="0">
-            <a:noFill/>
-          </a:ln>
-        </p:spPr>
-        <p:style>
-          <a:lnRef idx="0"/>
-          <a:fillRef idx="0"/>
-          <a:effectRef idx="0"/>
-          <a:fontRef idx="minor"/>
-        </p:style>
-        <p:txBody>
-          <a:bodyPr lIns="90000" rIns="90000" tIns="45000" bIns="45000" anchor="ctr">
-            <a:noAutofit/>
-          </a:bodyPr>
-          <a:p>
-            <a:pPr algn="ctr">
-              <a:lnSpc>
-                <a:spcPct val="100000"/>
-              </a:lnSpc>
-              <a:buNone/>
-            </a:pPr>
-            <a:r>
-              <a:rPr b="0" lang="en-US" sz="1800" spc="-1" strike="noStrike">
-                <a:solidFill>
-                  <a:srgbClr val="ffffff"/>
-                </a:solidFill>
-                <a:latin typeface="Calibri"/>
-              </a:rPr>
-              <a:t>PIC</a:t>
-            </a:r>
-            <a:endParaRPr b="0" lang="en-US" sz="1800" spc="-1" strike="noStrike">
-              <a:latin typeface="Arial"/>
-            </a:endParaRPr>
-          </a:p>
-        </p:txBody>
-      </p:sp>
-      <p:sp>
-        <p:nvSpPr>
-          <p:cNvPr id="111" name="Чип_1"/>
-          <p:cNvSpPr/>
-          <p:nvPr/>
-        </p:nvSpPr>
-        <p:spPr>
-          <a:xfrm>
-            <a:off x="474480" y="5290560"/>
-            <a:ext cx="4673880" cy="1255680"/>
+          <p:cNvPr id="110" name="Чип_1"/>
+          <p:cNvSpPr/>
+          <p:nvPr/>
+        </p:nvSpPr>
+        <p:spPr>
+          <a:xfrm>
+            <a:off x="639360" y="5290560"/>
+            <a:ext cx="5315040" cy="1255680"/>
           </a:xfrm>
           <a:prstGeom prst="roundRect">
             <a:avLst>
@@ -10748,13 +10695,13 @@
       </p:sp>
       <p:sp>
         <p:nvSpPr>
-          <p:cNvPr id="112" name="SUBTITLE 2"/>
-          <p:cNvSpPr/>
-          <p:nvPr/>
-        </p:nvSpPr>
-        <p:spPr>
-          <a:xfrm>
-            <a:off x="639360" y="5413320"/>
+          <p:cNvPr id="111" name="SUBTITLE 2"/>
+          <p:cNvSpPr/>
+          <p:nvPr/>
+        </p:nvSpPr>
+        <p:spPr>
+          <a:xfrm>
+            <a:off x="803880" y="5413320"/>
             <a:ext cx="4345920" cy="465480"/>
           </a:xfrm>
           <a:prstGeom prst="rect">
@@ -10803,13 +10750,13 @@
       </p:sp>
       <p:sp>
         <p:nvSpPr>
-          <p:cNvPr id="113" name="TEXT 2"/>
-          <p:cNvSpPr/>
-          <p:nvPr/>
-        </p:nvSpPr>
-        <p:spPr>
-          <a:xfrm>
-            <a:off x="639360" y="5952240"/>
+          <p:cNvPr id="112" name="TEXT 2"/>
+          <p:cNvSpPr/>
+          <p:nvPr/>
+        </p:nvSpPr>
+        <p:spPr>
+          <a:xfrm>
+            <a:off x="803880" y="5952240"/>
             <a:ext cx="4345920" cy="502560"/>
           </a:xfrm>
           <a:prstGeom prst="rect">
@@ -10856,94 +10803,16 @@
           </a:p>
         </p:txBody>
       </p:sp>
-      <p:pic>
-        <p:nvPicPr>
-          <p:cNvPr id="114" name="Кнопка_Навигация_Фон" descr="/home/claude/vistas/assets/grad_circle.png"/>
-          <p:cNvPicPr/>
-          <p:nvPr/>
-        </p:nvPicPr>
-        <p:blipFill>
-          <a:blip r:embed="rId1"/>
-          <a:stretch/>
-        </p:blipFill>
-        <p:spPr>
-          <a:xfrm>
-            <a:off x="11228760" y="5897880"/>
-            <a:ext cx="502560" cy="502560"/>
-          </a:xfrm>
-          <a:prstGeom prst="rect">
-            <a:avLst/>
-          </a:prstGeom>
-          <a:ln w="0">
-            <a:noFill/>
-          </a:ln>
-        </p:spPr>
-      </p:pic>
-      <p:sp>
-        <p:nvSpPr>
-          <p:cNvPr id="115" name="Кнопка_Навигация_Стрелка"/>
-          <p:cNvSpPr/>
-          <p:nvPr/>
-        </p:nvSpPr>
-        <p:spPr>
-          <a:xfrm>
-            <a:off x="11228760" y="5897880"/>
-            <a:ext cx="502560" cy="502560"/>
-          </a:xfrm>
-          <a:prstGeom prst="rect">
-            <a:avLst/>
-          </a:prstGeom>
-          <a:noFill/>
-          <a:ln w="0">
-            <a:noFill/>
-          </a:ln>
-        </p:spPr>
-        <p:style>
-          <a:lnRef idx="0"/>
-          <a:fillRef idx="0"/>
-          <a:effectRef idx="0"/>
-          <a:fontRef idx="minor"/>
-        </p:style>
-        <p:txBody>
-          <a:bodyPr lIns="0" rIns="0" tIns="0" bIns="0" anchor="ctr">
-            <a:noAutofit/>
-          </a:bodyPr>
-          <a:p>
-            <a:pPr algn="ctr">
-              <a:lnSpc>
-                <a:spcPct val="100000"/>
-              </a:lnSpc>
-              <a:buNone/>
-              <a:tabLst>
-                <a:tab algn="l" pos="0"/>
-              </a:tabLst>
-            </a:pPr>
-            <a:r>
-              <a:rPr b="1" lang="en-US" sz="2000" spc="-1" strike="noStrike">
-                <a:solidFill>
-                  <a:srgbClr val="ffffff"/>
-                </a:solidFill>
-                <a:latin typeface="Arial"/>
-                <a:ea typeface="Arial"/>
-              </a:rPr>
-              <a:t>→</a:t>
-            </a:r>
-            <a:endParaRPr b="0" lang="en-US" sz="2000" spc="-1" strike="noStrike">
-              <a:latin typeface="Arial"/>
-            </a:endParaRPr>
-          </a:p>
-        </p:txBody>
-      </p:sp>
-      <p:sp>
-        <p:nvSpPr>
-          <p:cNvPr id="116" name="Чип_1"/>
-          <p:cNvSpPr/>
-          <p:nvPr/>
-        </p:nvSpPr>
-        <p:spPr>
-          <a:xfrm>
-            <a:off x="5677560" y="5290560"/>
-            <a:ext cx="4673880" cy="1255680"/>
+      <p:sp>
+        <p:nvSpPr>
+          <p:cNvPr id="113" name="Чип_1"/>
+          <p:cNvSpPr/>
+          <p:nvPr/>
+        </p:nvSpPr>
+        <p:spPr>
+          <a:xfrm>
+            <a:off x="6234480" y="5290560"/>
+            <a:ext cx="5313240" cy="1255680"/>
           </a:xfrm>
           <a:prstGeom prst="roundRect">
             <a:avLst>
@@ -10971,13 +10840,13 @@
       </p:sp>
       <p:sp>
         <p:nvSpPr>
-          <p:cNvPr id="117" name="SUBTITLE 2"/>
-          <p:cNvSpPr/>
-          <p:nvPr/>
-        </p:nvSpPr>
-        <p:spPr>
-          <a:xfrm>
-            <a:off x="5842080" y="5413320"/>
+          <p:cNvPr id="114" name="SUBTITLE 2"/>
+          <p:cNvSpPr/>
+          <p:nvPr/>
+        </p:nvSpPr>
+        <p:spPr>
+          <a:xfrm>
+            <a:off x="6399000" y="5413320"/>
             <a:ext cx="4345920" cy="465480"/>
           </a:xfrm>
           <a:prstGeom prst="rect">
@@ -11036,13 +10905,13 @@
       </p:sp>
       <p:sp>
         <p:nvSpPr>
-          <p:cNvPr id="118" name="TEXT 2"/>
-          <p:cNvSpPr/>
-          <p:nvPr/>
-        </p:nvSpPr>
-        <p:spPr>
-          <a:xfrm>
-            <a:off x="5842080" y="5952240"/>
+          <p:cNvPr id="115" name="TEXT 2"/>
+          <p:cNvSpPr/>
+          <p:nvPr/>
+        </p:nvSpPr>
+        <p:spPr>
+          <a:xfrm>
+            <a:off x="6399000" y="5952240"/>
             <a:ext cx="4345920" cy="502560"/>
           </a:xfrm>
           <a:prstGeom prst="rect">
@@ -11101,14 +10970,14 @@
       </p:sp>
       <p:sp>
         <p:nvSpPr>
-          <p:cNvPr id="119" name="Чип_1"/>
-          <p:cNvSpPr/>
-          <p:nvPr/>
-        </p:nvSpPr>
-        <p:spPr>
-          <a:xfrm>
-            <a:off x="474480" y="4143240"/>
-            <a:ext cx="9876960" cy="977040"/>
+          <p:cNvPr id="116" name="Чип_1"/>
+          <p:cNvSpPr/>
+          <p:nvPr/>
+        </p:nvSpPr>
+        <p:spPr>
+          <a:xfrm>
+            <a:off x="639360" y="4143240"/>
+            <a:ext cx="10908360" cy="977040"/>
           </a:xfrm>
           <a:prstGeom prst="roundRect">
             <a:avLst>
@@ -11136,13 +11005,13 @@
       </p:sp>
       <p:sp>
         <p:nvSpPr>
-          <p:cNvPr id="120" name="SUBTITLE 2"/>
-          <p:cNvSpPr/>
-          <p:nvPr/>
-        </p:nvSpPr>
-        <p:spPr>
-          <a:xfrm>
-            <a:off x="639360" y="4143240"/>
+          <p:cNvPr id="117" name="SUBTITLE 2"/>
+          <p:cNvSpPr/>
+          <p:nvPr/>
+        </p:nvSpPr>
+        <p:spPr>
+          <a:xfrm>
+            <a:off x="803880" y="4143240"/>
             <a:ext cx="9549000" cy="309600"/>
           </a:xfrm>
           <a:prstGeom prst="rect">
@@ -11201,13 +11070,13 @@
       </p:sp>
       <p:sp>
         <p:nvSpPr>
-          <p:cNvPr id="121" name="TEXT 2"/>
-          <p:cNvSpPr/>
-          <p:nvPr/>
-        </p:nvSpPr>
-        <p:spPr>
-          <a:xfrm>
-            <a:off x="639360" y="4526280"/>
+          <p:cNvPr id="118" name="TEXT 2"/>
+          <p:cNvSpPr/>
+          <p:nvPr/>
+        </p:nvSpPr>
+        <p:spPr>
+          <a:xfrm>
+            <a:off x="803880" y="4526280"/>
             <a:ext cx="9549000" cy="502560"/>
           </a:xfrm>
           <a:prstGeom prst="rect">
@@ -11266,7 +11135,7 @@
       </p:sp>
       <p:sp>
         <p:nvSpPr>
-          <p:cNvPr id="122" name="TITLE"/>
+          <p:cNvPr id="119" name="TITLE"/>
           <p:cNvSpPr/>
           <p:nvPr/>
         </p:nvSpPr>
@@ -11314,6 +11183,66 @@
               <a:t>TITLE</a:t>
             </a:r>
             <a:endParaRPr b="0" lang="en-US" sz="3200" spc="-1" strike="noStrike">
+              <a:latin typeface="Arial"/>
+            </a:endParaRPr>
+          </a:p>
+        </p:txBody>
+      </p:sp>
+      <p:sp>
+        <p:nvSpPr>
+          <p:cNvPr id="120" name="PIC 1"/>
+          <p:cNvSpPr/>
+          <p:nvPr/>
+        </p:nvSpPr>
+        <p:spPr>
+          <a:xfrm>
+            <a:off x="638280" y="1410840"/>
+            <a:ext cx="10908360" cy="2447640"/>
+          </a:xfrm>
+          <a:prstGeom prst="roundRect">
+            <a:avLst>
+              <a:gd name="adj" fmla="val 4706"/>
+            </a:avLst>
+          </a:prstGeom>
+          <a:solidFill>
+            <a:schemeClr val="bg1">
+              <a:lumMod val="85000"/>
+            </a:schemeClr>
+          </a:solidFill>
+          <a:ln w="9525">
+            <a:solidFill>
+              <a:srgbClr val="6e6e6e"/>
+            </a:solidFill>
+            <a:round/>
+          </a:ln>
+        </p:spPr>
+        <p:style>
+          <a:lnRef idx="0"/>
+          <a:fillRef idx="0"/>
+          <a:effectRef idx="0"/>
+          <a:fontRef idx="minor"/>
+        </p:style>
+        <p:txBody>
+          <a:bodyPr lIns="90000" rIns="90000" tIns="45000" bIns="45000" anchor="ctr">
+            <a:noAutofit/>
+          </a:bodyPr>
+          <a:p>
+            <a:pPr algn="ctr">
+              <a:lnSpc>
+                <a:spcPct val="100000"/>
+              </a:lnSpc>
+              <a:buNone/>
+            </a:pPr>
+            <a:r>
+              <a:rPr b="0" lang="en-US" sz="1800" spc="-1" strike="noStrike">
+                <a:solidFill>
+                  <a:srgbClr val="ffffff"/>
+                </a:solidFill>
+                <a:latin typeface="Calibri"/>
+              </a:rPr>
+              <a:t>PIC</a:t>
+            </a:r>
+            <a:endParaRPr b="0" lang="en-US" sz="1800" spc="-1" strike="noStrike">
               <a:latin typeface="Arial"/>
             </a:endParaRPr>
           </a:p>
@@ -11358,7 +11287,7 @@
       </p:grpSpPr>
       <p:sp>
         <p:nvSpPr>
-          <p:cNvPr id="123" name="Блок_3"/>
+          <p:cNvPr id="121" name="Блок_3"/>
           <p:cNvSpPr/>
           <p:nvPr/>
         </p:nvSpPr>
@@ -11391,7 +11320,7 @@
       </p:sp>
       <p:sp>
         <p:nvSpPr>
-          <p:cNvPr id="124" name="Блок_1"/>
+          <p:cNvPr id="122" name="Блок_1"/>
           <p:cNvSpPr/>
           <p:nvPr/>
         </p:nvSpPr>
@@ -11424,7 +11353,7 @@
       </p:sp>
       <p:pic>
         <p:nvPicPr>
-          <p:cNvPr id="125" name="Кнопка_Навигация_Фон" descr="/home/claude/vistas/assets/grad_circle.png"/>
+          <p:cNvPr id="123" name="Кнопка_Навигация_Фон" descr="/home/claude/vistas/assets/grad_circle.png"/>
           <p:cNvPicPr/>
           <p:nvPr/>
         </p:nvPicPr>
@@ -11447,7 +11376,7 @@
       </p:pic>
       <p:sp>
         <p:nvSpPr>
-          <p:cNvPr id="126" name="SUBTITLE 1"/>
+          <p:cNvPr id="124" name="SUBTITLE 1"/>
           <p:cNvSpPr/>
           <p:nvPr/>
         </p:nvSpPr>
@@ -11502,7 +11431,7 @@
       </p:sp>
       <p:sp>
         <p:nvSpPr>
-          <p:cNvPr id="127" name="TEXT 1"/>
+          <p:cNvPr id="125" name="TEXT 1"/>
           <p:cNvSpPr/>
           <p:nvPr/>
         </p:nvSpPr>
@@ -11557,7 +11486,7 @@
       </p:sp>
       <p:sp>
         <p:nvSpPr>
-          <p:cNvPr id="128" name="Блок_2"/>
+          <p:cNvPr id="126" name="Блок_2"/>
           <p:cNvSpPr/>
           <p:nvPr/>
         </p:nvSpPr>
@@ -11590,7 +11519,7 @@
       </p:sp>
       <p:sp>
         <p:nvSpPr>
-          <p:cNvPr id="129" name="SUBTITLE 2"/>
+          <p:cNvPr id="127" name="SUBTITLE 2"/>
           <p:cNvSpPr/>
           <p:nvPr/>
         </p:nvSpPr>
@@ -11645,7 +11574,7 @@
       </p:sp>
       <p:sp>
         <p:nvSpPr>
-          <p:cNvPr id="130" name="TEXT 2"/>
+          <p:cNvPr id="128" name="TEXT 2"/>
           <p:cNvSpPr/>
           <p:nvPr/>
         </p:nvSpPr>
@@ -11700,7 +11629,7 @@
       </p:sp>
       <p:sp>
         <p:nvSpPr>
-          <p:cNvPr id="131" name="SUBTITLE 3"/>
+          <p:cNvPr id="129" name="SUBTITLE 3"/>
           <p:cNvSpPr/>
           <p:nvPr/>
         </p:nvSpPr>
@@ -11755,7 +11684,7 @@
       </p:sp>
       <p:sp>
         <p:nvSpPr>
-          <p:cNvPr id="132" name="TEXT 3"/>
+          <p:cNvPr id="130" name="TEXT 3"/>
           <p:cNvSpPr/>
           <p:nvPr/>
         </p:nvSpPr>
@@ -11810,7 +11739,7 @@
       </p:sp>
       <p:sp>
         <p:nvSpPr>
-          <p:cNvPr id="133" name="TITLE"/>
+          <p:cNvPr id="131" name="TITLE"/>
           <p:cNvSpPr/>
           <p:nvPr/>
         </p:nvSpPr>
@@ -11865,7 +11794,7 @@
       </p:sp>
       <p:sp>
         <p:nvSpPr>
-          <p:cNvPr id="134" name="Кнопка_Навигация_Стрелка"/>
+          <p:cNvPr id="132" name="Кнопка_Навигация_Стрелка"/>
           <p:cNvSpPr/>
           <p:nvPr/>
         </p:nvSpPr>
@@ -11957,7 +11886,7 @@
       </p:grpSpPr>
       <p:sp>
         <p:nvSpPr>
-          <p:cNvPr id="135" name="Карточка_1"/>
+          <p:cNvPr id="133" name="Карточка_1"/>
           <p:cNvSpPr/>
           <p:nvPr/>
         </p:nvSpPr>
@@ -11990,7 +11919,7 @@
       </p:sp>
       <p:sp>
         <p:nvSpPr>
-          <p:cNvPr id="136" name="PIC 1"/>
+          <p:cNvPr id="134" name="PIC 1"/>
           <p:cNvSpPr/>
           <p:nvPr/>
         </p:nvSpPr>
@@ -12048,7 +11977,7 @@
       </p:sp>
       <p:sp>
         <p:nvSpPr>
-          <p:cNvPr id="137" name="SUBTITLE 1"/>
+          <p:cNvPr id="135" name="SUBTITLE 1"/>
           <p:cNvSpPr/>
           <p:nvPr/>
         </p:nvSpPr>
@@ -12103,7 +12032,7 @@
       </p:sp>
       <p:sp>
         <p:nvSpPr>
-          <p:cNvPr id="138" name="TEXT 1"/>
+          <p:cNvPr id="136" name="TEXT 1"/>
           <p:cNvSpPr/>
           <p:nvPr/>
         </p:nvSpPr>
@@ -12158,7 +12087,7 @@
       </p:sp>
       <p:sp>
         <p:nvSpPr>
-          <p:cNvPr id="139" name="Карточка_2"/>
+          <p:cNvPr id="137" name="Карточка_2"/>
           <p:cNvSpPr/>
           <p:nvPr/>
         </p:nvSpPr>
@@ -12191,7 +12120,7 @@
       </p:sp>
       <p:sp>
         <p:nvSpPr>
-          <p:cNvPr id="140" name="PIC 2"/>
+          <p:cNvPr id="138" name="PIC 2"/>
           <p:cNvSpPr/>
           <p:nvPr/>
         </p:nvSpPr>
@@ -12249,7 +12178,7 @@
       </p:sp>
       <p:sp>
         <p:nvSpPr>
-          <p:cNvPr id="141" name="SUBTITLE 2"/>
+          <p:cNvPr id="139" name="SUBTITLE 2"/>
           <p:cNvSpPr/>
           <p:nvPr/>
         </p:nvSpPr>
@@ -12304,7 +12233,7 @@
       </p:sp>
       <p:sp>
         <p:nvSpPr>
-          <p:cNvPr id="142" name="TEXT 2"/>
+          <p:cNvPr id="140" name="TEXT 2"/>
           <p:cNvSpPr/>
           <p:nvPr/>
         </p:nvSpPr>
@@ -12359,7 +12288,7 @@
       </p:sp>
       <p:sp>
         <p:nvSpPr>
-          <p:cNvPr id="143" name="Карточка_3"/>
+          <p:cNvPr id="141" name="Карточка_3"/>
           <p:cNvSpPr/>
           <p:nvPr/>
         </p:nvSpPr>
@@ -12392,7 +12321,7 @@
       </p:sp>
       <p:sp>
         <p:nvSpPr>
-          <p:cNvPr id="144" name="PIC 3"/>
+          <p:cNvPr id="142" name="PIC 3"/>
           <p:cNvSpPr/>
           <p:nvPr/>
         </p:nvSpPr>
@@ -12450,7 +12379,7 @@
       </p:sp>
       <p:sp>
         <p:nvSpPr>
-          <p:cNvPr id="145" name="SUBTITLE 3"/>
+          <p:cNvPr id="143" name="SUBTITLE 3"/>
           <p:cNvSpPr/>
           <p:nvPr/>
         </p:nvSpPr>
@@ -12505,7 +12434,7 @@
       </p:sp>
       <p:sp>
         <p:nvSpPr>
-          <p:cNvPr id="146" name="TEXT 3"/>
+          <p:cNvPr id="144" name="TEXT 3"/>
           <p:cNvSpPr/>
           <p:nvPr/>
         </p:nvSpPr>
@@ -12560,7 +12489,7 @@
       </p:sp>
       <p:sp>
         <p:nvSpPr>
-          <p:cNvPr id="147" name="TITLE"/>
+          <p:cNvPr id="145" name="TITLE"/>
           <p:cNvSpPr/>
           <p:nvPr/>
         </p:nvSpPr>
@@ -12615,7 +12544,7 @@
       </p:sp>
       <p:pic>
         <p:nvPicPr>
-          <p:cNvPr id="148" name="Кнопка_Навигация_Фон" descr="/home/claude/vistas/assets/grad_circle.png"/>
+          <p:cNvPr id="146" name="Кнопка_Навигация_Фон" descr="/home/claude/vistas/assets/grad_circle.png"/>
           <p:cNvPicPr/>
           <p:nvPr/>
         </p:nvPicPr>
@@ -12638,7 +12567,7 @@
       </p:pic>
       <p:sp>
         <p:nvSpPr>
-          <p:cNvPr id="149" name="Кнопка_Навигация_Стрелка"/>
+          <p:cNvPr id="147" name="Кнопка_Навигация_Стрелка"/>
           <p:cNvSpPr/>
           <p:nvPr/>
         </p:nvSpPr>
